--- a/syllabus/ZoomLinks.pptx
+++ b/syllabus/ZoomLinks.pptx
@@ -8,7 +8,7 @@
     <p:sldId id="257" r:id="rId2"/>
   </p:sldIdLst>
   <p:sldSz cx="12192000" cy="6858000"/>
-  <p:notesSz cx="6858000" cy="9144000"/>
+  <p:notesSz cx="7315200" cy="9601200"/>
   <p:defaultTextStyle>
     <a:defPPr>
       <a:defRPr lang="en-US"/>
@@ -104,6 +104,11 @@
       </a:defRPr>
     </a:lvl9pPr>
   </p:defaultTextStyle>
+  <p:extLst>
+    <p:ext uri="{EFAFB233-063F-42B5-8137-9DF3F51BA10A}">
+      <p15:sldGuideLst xmlns:p15="http://schemas.microsoft.com/office/powerpoint/2012/main"/>
+    </p:ext>
+  </p:extLst>
 </p:presentation>
 </file>
 
@@ -254,7 +259,7 @@
           <a:p>
             <a:fld id="{4C7E720A-986D-4F36-80A1-9A50154DB1B0}" type="datetimeFigureOut">
               <a:rPr lang="en-US" smtClean="0"/>
-              <a:t>8/19/2026</a:t>
+              <a:t>8/24/2026</a:t>
             </a:fld>
             <a:endParaRPr lang="en-US"/>
           </a:p>
@@ -452,7 +457,7 @@
           <a:p>
             <a:fld id="{4C7E720A-986D-4F36-80A1-9A50154DB1B0}" type="datetimeFigureOut">
               <a:rPr lang="en-US" smtClean="0"/>
-              <a:t>8/19/2026</a:t>
+              <a:t>8/24/2026</a:t>
             </a:fld>
             <a:endParaRPr lang="en-US"/>
           </a:p>
@@ -660,7 +665,7 @@
           <a:p>
             <a:fld id="{4C7E720A-986D-4F36-80A1-9A50154DB1B0}" type="datetimeFigureOut">
               <a:rPr lang="en-US" smtClean="0"/>
-              <a:t>8/19/2026</a:t>
+              <a:t>8/24/2026</a:t>
             </a:fld>
             <a:endParaRPr lang="en-US"/>
           </a:p>
@@ -858,7 +863,7 @@
           <a:p>
             <a:fld id="{4C7E720A-986D-4F36-80A1-9A50154DB1B0}" type="datetimeFigureOut">
               <a:rPr lang="en-US" smtClean="0"/>
-              <a:t>8/19/2026</a:t>
+              <a:t>8/24/2026</a:t>
             </a:fld>
             <a:endParaRPr lang="en-US"/>
           </a:p>
@@ -1133,7 +1138,7 @@
           <a:p>
             <a:fld id="{4C7E720A-986D-4F36-80A1-9A50154DB1B0}" type="datetimeFigureOut">
               <a:rPr lang="en-US" smtClean="0"/>
-              <a:t>8/19/2026</a:t>
+              <a:t>8/24/2026</a:t>
             </a:fld>
             <a:endParaRPr lang="en-US"/>
           </a:p>
@@ -1398,7 +1403,7 @@
           <a:p>
             <a:fld id="{4C7E720A-986D-4F36-80A1-9A50154DB1B0}" type="datetimeFigureOut">
               <a:rPr lang="en-US" smtClean="0"/>
-              <a:t>8/19/2026</a:t>
+              <a:t>8/24/2026</a:t>
             </a:fld>
             <a:endParaRPr lang="en-US"/>
           </a:p>
@@ -1810,7 +1815,7 @@
           <a:p>
             <a:fld id="{4C7E720A-986D-4F36-80A1-9A50154DB1B0}" type="datetimeFigureOut">
               <a:rPr lang="en-US" smtClean="0"/>
-              <a:t>8/19/2026</a:t>
+              <a:t>8/24/2026</a:t>
             </a:fld>
             <a:endParaRPr lang="en-US"/>
           </a:p>
@@ -1951,7 +1956,7 @@
           <a:p>
             <a:fld id="{4C7E720A-986D-4F36-80A1-9A50154DB1B0}" type="datetimeFigureOut">
               <a:rPr lang="en-US" smtClean="0"/>
-              <a:t>8/19/2026</a:t>
+              <a:t>8/24/2026</a:t>
             </a:fld>
             <a:endParaRPr lang="en-US"/>
           </a:p>
@@ -2064,7 +2069,7 @@
           <a:p>
             <a:fld id="{4C7E720A-986D-4F36-80A1-9A50154DB1B0}" type="datetimeFigureOut">
               <a:rPr lang="en-US" smtClean="0"/>
-              <a:t>8/19/2026</a:t>
+              <a:t>8/24/2026</a:t>
             </a:fld>
             <a:endParaRPr lang="en-US"/>
           </a:p>
@@ -2375,7 +2380,7 @@
           <a:p>
             <a:fld id="{4C7E720A-986D-4F36-80A1-9A50154DB1B0}" type="datetimeFigureOut">
               <a:rPr lang="en-US" smtClean="0"/>
-              <a:t>8/19/2026</a:t>
+              <a:t>8/24/2026</a:t>
             </a:fld>
             <a:endParaRPr lang="en-US"/>
           </a:p>
@@ -2663,7 +2668,7 @@
           <a:p>
             <a:fld id="{4C7E720A-986D-4F36-80A1-9A50154DB1B0}" type="datetimeFigureOut">
               <a:rPr lang="en-US" smtClean="0"/>
-              <a:t>8/19/2026</a:t>
+              <a:t>8/24/2026</a:t>
             </a:fld>
             <a:endParaRPr lang="en-US"/>
           </a:p>
@@ -2904,7 +2909,7 @@
           <a:p>
             <a:fld id="{4C7E720A-986D-4F36-80A1-9A50154DB1B0}" type="datetimeFigureOut">
               <a:rPr lang="en-US" smtClean="0"/>
-              <a:t>8/19/2026</a:t>
+              <a:t>8/24/2026</a:t>
             </a:fld>
             <a:endParaRPr lang="en-US"/>
           </a:p>
@@ -3372,7 +3377,7 @@
           <a:p>
             <a:r>
               <a:rPr lang="en-US" dirty="0"/>
-              <a:t>Class </a:t>
+              <a:t>Class: </a:t>
             </a:r>
             <a:r>
               <a:rPr lang="en-US" dirty="0" err="1"/>
@@ -3389,6 +3394,37 @@
                 <a:hlinkClick r:id="rId2"/>
               </a:rPr>
               <a:t>https://cuboulder.zoom.us/j/91980978211</a:t>
+            </a:r>
+            <a:endParaRPr lang="en-US" dirty="0"/>
+          </a:p>
+          <a:p>
+            <a:endParaRPr lang="en-US" dirty="0"/>
+          </a:p>
+          <a:p>
+            <a:r>
+              <a:rPr lang="en-US" dirty="0"/>
+              <a:t>Office Hours: </a:t>
+            </a:r>
+            <a:r>
+              <a:rPr lang="en-US" dirty="0" err="1"/>
+              <a:t>TTh</a:t>
+            </a:r>
+            <a:r>
+              <a:rPr lang="en-US" dirty="0"/>
+              <a:t> 12:00 – 2:00 pm (P. </a:t>
+            </a:r>
+            <a:r>
+              <a:rPr lang="en-US"/>
+              <a:t>Mathys)</a:t>
+            </a:r>
+            <a:endParaRPr lang="en-US" dirty="0"/>
+          </a:p>
+          <a:p>
+            <a:r>
+              <a:rPr lang="en-US" dirty="0">
+                <a:hlinkClick r:id="rId3"/>
+              </a:rPr>
+              <a:t>https://cuboulder.zoom.us/j/97038105046</a:t>
             </a:r>
             <a:endParaRPr lang="en-US" dirty="0"/>
           </a:p>
